--- a/OPERACIONES-APRENDIZAJE-AUTOMATICO/Proyecto/Fase 2_Equipo59.pptx
+++ b/OPERACIONES-APRENDIZAJE-AUTOMATICO/Proyecto/Fase 2_Equipo59.pptx
@@ -33132,7 +33132,7 @@
         </p:blipFill>
         <p:spPr>
           <a:xfrm>
-            <a:off x="571550" y="2322425"/>
+            <a:off x="631950" y="2196363"/>
             <a:ext cx="4477501" cy="2666325"/>
           </a:xfrm>
           <a:prstGeom prst="rect">
@@ -46822,7 +46822,7 @@
             <a:tbl>
               <a:tblPr bandRow="1">
                 <a:noFill/>
-                <a:tableStyleId>{01D4240A-D0C2-4553-A470-B7691AAB339E}</a:tableStyleId>
+                <a:tableStyleId>{7E70F448-5C34-4DF1-AD9C-3E6FBF5B6CA0}</a:tableStyleId>
               </a:tblPr>
               <a:tblGrid>
                 <a:gridCol w="715400"/>
@@ -57359,9 +57359,9 @@
 </file>
 
 <file path=ppt/theme/theme1.xml><?xml version="1.0" encoding="utf-8"?>
-<a:theme xmlns:a="http://schemas.openxmlformats.org/drawingml/2006/main" xmlns:r="http://schemas.openxmlformats.org/officeDocument/2006/relationships" name="Facet">
+<a:theme xmlns:a="http://schemas.openxmlformats.org/drawingml/2006/main" xmlns:r="http://schemas.openxmlformats.org/officeDocument/2006/relationships">
   <a:themeElements>
-    <a:clrScheme name="Facet">
+    <a:clrScheme name="Default">
       <a:dk1>
         <a:srgbClr val="000000"/>
       </a:dk1>
@@ -57369,34 +57369,34 @@
         <a:srgbClr val="FFFFFF"/>
       </a:lt1>
       <a:dk2>
-        <a:srgbClr val="2C3C43"/>
+        <a:srgbClr val="158158"/>
       </a:dk2>
       <a:lt2>
-        <a:srgbClr val="EBEBEB"/>
+        <a:srgbClr val="F3F3F3"/>
       </a:lt2>
       <a:accent1>
-        <a:srgbClr val="90C226"/>
+        <a:srgbClr val="058DC7"/>
       </a:accent1>
       <a:accent2>
-        <a:srgbClr val="54A021"/>
+        <a:srgbClr val="50B432"/>
       </a:accent2>
       <a:accent3>
-        <a:srgbClr val="E6B91E"/>
+        <a:srgbClr val="ED561B"/>
       </a:accent3>
       <a:accent4>
-        <a:srgbClr val="E76618"/>
+        <a:srgbClr val="EDEF00"/>
       </a:accent4>
       <a:accent5>
-        <a:srgbClr val="C42F1A"/>
+        <a:srgbClr val="24CBE5"/>
       </a:accent5>
       <a:accent6>
-        <a:srgbClr val="918655"/>
+        <a:srgbClr val="64E572"/>
       </a:accent6>
       <a:hlink>
-        <a:srgbClr val="99CA3C"/>
+        <a:srgbClr val="2200CC"/>
       </a:hlink>
       <a:folHlink>
-        <a:srgbClr val="B9D181"/>
+        <a:srgbClr val="551A8B"/>
       </a:folHlink>
     </a:clrScheme>
     <a:fontScheme name="Office">
@@ -57917,9 +57917,9 @@
 </file>
 
 <file path=ppt/theme/theme3.xml><?xml version="1.0" encoding="utf-8"?>
-<a:theme xmlns:a="http://schemas.openxmlformats.org/drawingml/2006/main" xmlns:r="http://schemas.openxmlformats.org/officeDocument/2006/relationships">
+<a:theme xmlns:a="http://schemas.openxmlformats.org/drawingml/2006/main" xmlns:r="http://schemas.openxmlformats.org/officeDocument/2006/relationships" name="Facet">
   <a:themeElements>
-    <a:clrScheme name="Default">
+    <a:clrScheme name="Facet">
       <a:dk1>
         <a:srgbClr val="000000"/>
       </a:dk1>
@@ -57927,34 +57927,34 @@
         <a:srgbClr val="FFFFFF"/>
       </a:lt1>
       <a:dk2>
-        <a:srgbClr val="158158"/>
+        <a:srgbClr val="2C3C43"/>
       </a:dk2>
       <a:lt2>
-        <a:srgbClr val="F3F3F3"/>
+        <a:srgbClr val="EBEBEB"/>
       </a:lt2>
       <a:accent1>
-        <a:srgbClr val="058DC7"/>
+        <a:srgbClr val="90C226"/>
       </a:accent1>
       <a:accent2>
-        <a:srgbClr val="50B432"/>
+        <a:srgbClr val="54A021"/>
       </a:accent2>
       <a:accent3>
-        <a:srgbClr val="ED561B"/>
+        <a:srgbClr val="E6B91E"/>
       </a:accent3>
       <a:accent4>
-        <a:srgbClr val="EDEF00"/>
+        <a:srgbClr val="E76618"/>
       </a:accent4>
       <a:accent5>
-        <a:srgbClr val="24CBE5"/>
+        <a:srgbClr val="C42F1A"/>
       </a:accent5>
       <a:accent6>
-        <a:srgbClr val="64E572"/>
+        <a:srgbClr val="918655"/>
       </a:accent6>
       <a:hlink>
-        <a:srgbClr val="2200CC"/>
+        <a:srgbClr val="99CA3C"/>
       </a:hlink>
       <a:folHlink>
-        <a:srgbClr val="551A8B"/>
+        <a:srgbClr val="B9D181"/>
       </a:folHlink>
     </a:clrScheme>
     <a:fontScheme name="Office">
